--- a/MeetingMind_AI_Presentation.pptx
+++ b/MeetingMind_AI_Presentation.pptx
@@ -576,7 +576,7 @@
           <a:lstStyle/>
           <a:p>
             <a:r>
-              <a:t>WHAT TO SAY (50s): “Meetings produce unstructured chaos. But the biggest issue isn't summarizing what happened—it's establishing real accountability. When notes say 'Priya may test, but hasn't confirmed yet' and 'we need a deployment plan soon', a typical LLM tries to be 'helpful' by guessing that Priya is the owner and fabricating a deadline. For EP-01, success means refusing to guess, enforcing strict ownership, isolating undecided architecture forks, and delivering actionable deliverables.”</a:t>
+              <a:t>WHAT TO SAY (50s): “Meetings produce unstructured chaos. But the biggest issue isn't summarizing what happened—it's establishing real accountability. When notes say 'Priya may test, but hasn't confirmed yet', a typical LLM tries to be helpful by guessing Priya is the owner and fabricating a deadline. For EP-01, success means refusing to guess, enforcing strict ownership, isolating undecided architecture forks, and delivering actionable deliverables.”</a:t>
             </a:r>
           </a:p>
         </p:txBody>
@@ -1443,7 +1443,7 @@
         <p:spPr>
           <a:xfrm>
             <a:off x="1939636" y="1842655"/>
-            <a:ext cx="8465128" cy="1723549"/>
+            <a:ext cx="8465128" cy="3108960"/>
           </a:xfrm>
           <a:prstGeom prst="rect">
             <a:avLst/>
@@ -1456,71 +1456,48 @@
           </a:bodyPr>
           <a:lstStyle/>
           <a:p>
-            <a:pPr>
-              <a:defRPr b="1" sz="3600"/>
-            </a:pPr>
-            <a:r>
+            <a:r>
+              <a:rPr sz="4600" b="1">
+                <a:solidFill>
+                  <a:srgbClr val="003B7A"/>
+                </a:solidFill>
+                <a:latin typeface="Aptos Display"/>
+              </a:rPr>
               <a:t>Hack-AI-Thon 2026</a:t>
             </a:r>
-            <a:br/>
-            <a:r>
+          </a:p>
+          <a:p>
+            <a:r>
+              <a:rPr sz="2400">
+                <a:solidFill>
+                  <a:srgbClr val="475569"/>
+                </a:solidFill>
+                <a:latin typeface="Aptos Display"/>
+              </a:rPr>
               <a:t>Solution Presentation</a:t>
             </a:r>
           </a:p>
-          <a:p>
-            <a:endParaRPr lang="en-US" dirty="0"/>
-          </a:p>
-          <a:p>
-            <a:r>
-              <a:rPr lang="en-US" sz="2800" dirty="0"/>
-              <a:t>Solution Presentation</a:t>
-            </a:r>
-          </a:p>
-        </p:txBody>
-      </p:sp>
-      <p:sp>
-        <p:nvSpPr>
-          <p:cNvPr id="3" name="TextBox 2"/>
-          <p:cNvSpPr txBox="1"/>
-          <p:nvPr/>
-        </p:nvSpPr>
-        <p:spPr>
-          <a:xfrm>
-            <a:off x="914400" y="4389120"/>
-            <a:ext cx="10332720" cy="1371600"/>
-          </a:xfrm>
-          <a:prstGeom prst="rect">
-            <a:avLst/>
-          </a:prstGeom>
-          <a:noFill/>
-        </p:spPr>
-        <p:txBody>
-          <a:bodyPr wrap="none">
-            <a:spAutoFit/>
-          </a:bodyPr>
-          <a:lstStyle/>
-          <a:p>
-            <a:pPr>
-              <a:defRPr sz="2200" b="1">
-                <a:solidFill>
-                  <a:srgbClr val="4F46E5"/>
-                </a:solidFill>
-              </a:defRPr>
-            </a:pPr>
-            <a:r>
+          <a:p/>
+          <a:p>
+            <a:r>
+              <a:rPr sz="2000" b="1">
+                <a:solidFill>
+                  <a:srgbClr val="003B7A"/>
+                </a:solidFill>
+                <a:latin typeface="Aptos"/>
+              </a:rPr>
               <a:t>MeetingMind AI — Smart Meeting Action Extractor</a:t>
             </a:r>
           </a:p>
           <a:p>
-            <a:pPr>
-              <a:defRPr sz="1400">
-                <a:solidFill>
-                  <a:srgbClr val="64748B"/>
-                </a:solidFill>
-              </a:defRPr>
-            </a:pPr>
-            <a:r>
-              <a:t>Track 3: Engagement Platforms • Problem EP-01 • Qualcomm Cloud AI Track</a:t>
+            <a:r>
+              <a:rPr sz="1300" b="0">
+                <a:solidFill>
+                  <a:srgbClr val="475569"/>
+                </a:solidFill>
+                <a:latin typeface="Aptos"/>
+              </a:rPr>
+              <a:t>Track 3: Engagement Platforms (EP-01)  •  Qualcomm Cloud AI Track</a:t>
             </a:r>
           </a:p>
         </p:txBody>
@@ -1708,23 +1685,21 @@
           <a:ln/>
         </p:spPr>
         <p:txBody>
-          <a:bodyPr wrap="square" lIns="0" tIns="0" rIns="0" bIns="0" rtlCol="0" anchor="ctr">
+          <a:bodyPr wrap="square" lIns="36576" tIns="36576" rIns="36576" bIns="36576" rtlCol="0" anchor="ctr">
             <a:normAutofit/>
           </a:bodyPr>
           <a:lstStyle/>
           <a:p>
-            <a:pPr marL="0" indent="0">
-              <a:buNone/>
-            </a:pPr>
-            <a:r>
-              <a:rPr sz="1800" b="1">
-                <a:solidFill>
-                  <a:srgbClr val="4F46E5"/>
-                </a:solidFill>
+            <a:pPr algn="l"/>
+            <a:r>
+              <a:rPr sz="2800" b="1">
+                <a:solidFill>
+                  <a:srgbClr val="003B7A"/>
+                </a:solidFill>
+                <a:latin typeface="Aptos"/>
               </a:rPr>
               <a:t>Team MeetingMind</a:t>
             </a:r>
-            <a:endParaRPr lang="en-US" sz="3200" dirty="0"/>
           </a:p>
         </p:txBody>
       </p:sp>
@@ -1841,32 +1816,21 @@
           <a:ln/>
         </p:spPr>
         <p:txBody>
-          <a:bodyPr wrap="square" lIns="254" tIns="254" rIns="254" bIns="254" rtlCol="0" anchor="ctr">
+          <a:bodyPr wrap="square" lIns="36576" tIns="36576" rIns="36576" bIns="36576" rtlCol="0" anchor="ctr">
             <a:normAutofit/>
           </a:bodyPr>
           <a:lstStyle/>
           <a:p>
-            <a:pPr marL="0" indent="0">
-              <a:buNone/>
-            </a:pPr>
-            <a:r>
-              <a:rPr sz="1200">
-                <a:solidFill>
-                  <a:srgbClr val="1E293B"/>
-                </a:solidFill>
-              </a:rPr>
-              <a:t>Infosys IGNITE ENG NEXT 2026</a:t>
-            </a:r>
-            <a:br/>
-            <a:r>
-              <a:rPr sz="1200">
-                <a:solidFill>
-                  <a:srgbClr val="1E293B"/>
-                </a:solidFill>
-              </a:rPr>
-              <a:t>Hack-AI-Thon</a:t>
-            </a:r>
-            <a:endParaRPr lang="en-US" sz="1200" dirty="0"/>
+            <a:pPr algn="l"/>
+            <a:r>
+              <a:rPr sz="1200" b="0">
+                <a:solidFill>
+                  <a:srgbClr val="0F172A"/>
+                </a:solidFill>
+                <a:latin typeface="Aptos"/>
+              </a:rPr>
+              <a:t>Infosys IGNITE ENG NEXT 2026 | Hyderabad</a:t>
+            </a:r>
           </a:p>
         </p:txBody>
       </p:sp>
@@ -1977,47 +1941,21 @@
           <a:ln/>
         </p:spPr>
         <p:txBody>
-          <a:bodyPr wrap="square" lIns="254" tIns="254" rIns="254" bIns="254" rtlCol="0" anchor="ctr">
+          <a:bodyPr wrap="square" lIns="36576" tIns="36576" rIns="36576" bIns="36576" rtlCol="0" anchor="ctr">
             <a:normAutofit/>
           </a:bodyPr>
           <a:lstStyle/>
           <a:p>
-            <a:pPr marL="0" indent="0">
-              <a:buNone/>
-            </a:pPr>
-            <a:r>
-              <a:rPr sz="1100">
-                <a:solidFill>
-                  <a:srgbClr val="1E293B"/>
-                </a:solidFill>
-              </a:rPr>
-              <a:t>Kowshik Ghanta (Full-Stack &amp; AI Systems Lead)</a:t>
-            </a:r>
-            <a:br/>
-            <a:r>
-              <a:rPr sz="1100">
-                <a:solidFill>
-                  <a:srgbClr val="1E293B"/>
-                </a:solidFill>
-              </a:rPr>
-              <a:t>• Team Member 2 (AI Engineer)</a:t>
-            </a:r>
-            <a:br/>
-            <a:r>
-              <a:rPr sz="1100">
-                <a:solidFill>
-                  <a:srgbClr val="1E293B"/>
-                </a:solidFill>
-              </a:rPr>
-              <a:t>• Team Member 3 (Product &amp; QA)</a:t>
-            </a:r>
-            <a:endParaRPr lang="en-US" sz="1200" dirty="0"/>
-          </a:p>
-          <a:p>
-            <a:pPr marL="0" indent="0">
-              <a:buNone/>
-            </a:pPr>
-            <a:endParaRPr lang="en-US" sz="1200" dirty="0"/>
+            <a:pPr algn="l"/>
+            <a:r>
+              <a:rPr sz="1200" b="0">
+                <a:solidFill>
+                  <a:srgbClr val="0F172A"/>
+                </a:solidFill>
+                <a:latin typeface="Aptos"/>
+              </a:rPr>
+              <a:t>Kowshik Ghanta (Lead)  •  Team Member 2  •  Team Member 3</a:t>
+            </a:r>
           </a:p>
         </p:txBody>
       </p:sp>
@@ -2128,32 +2066,21 @@
           <a:ln/>
         </p:spPr>
         <p:txBody>
-          <a:bodyPr wrap="square" lIns="254" tIns="254" rIns="254" bIns="254" rtlCol="0" anchor="ctr">
+          <a:bodyPr wrap="square" lIns="36576" tIns="36576" rIns="36576" bIns="36576" rtlCol="0" anchor="ctr">
             <a:normAutofit/>
           </a:bodyPr>
           <a:lstStyle/>
           <a:p>
-            <a:pPr marL="0" indent="0">
-              <a:buNone/>
-            </a:pPr>
-            <a:r>
-              <a:rPr sz="1100" b="1">
-                <a:solidFill>
-                  <a:srgbClr val="16A34A"/>
-                </a:solidFill>
+            <a:pPr algn="l"/>
+            <a:r>
+              <a:rPr sz="1200" b="1">
+                <a:solidFill>
+                  <a:srgbClr val="003B7A"/>
+                </a:solidFill>
+                <a:latin typeface="Aptos"/>
               </a:rPr>
               <a:t>EP-01: Smart Meeting Action Extractor</a:t>
             </a:r>
-            <a:br/>
-            <a:r>
-              <a:rPr sz="1100" b="1">
-                <a:solidFill>
-                  <a:srgbClr val="16A34A"/>
-                </a:solidFill>
-              </a:rPr>
-              <a:t>Technology Track: Qualcomm Cloud AI Playground (Cirrascale Inference Cloud)</a:t>
-            </a:r>
-            <a:endParaRPr lang="en-US" sz="1200" dirty="0"/>
           </a:p>
         </p:txBody>
       </p:sp>
@@ -2284,23 +2211,21 @@
             <a:ln/>
           </p:spPr>
           <p:txBody>
-            <a:bodyPr wrap="square" lIns="254" tIns="254" rIns="254" bIns="254" rtlCol="0" anchor="ctr">
+            <a:bodyPr wrap="square" lIns="36576" tIns="36576" rIns="36576" bIns="36576" rtlCol="0" anchor="ctr">
               <a:normAutofit/>
             </a:bodyPr>
             <a:lstStyle/>
             <a:p>
-              <a:pPr marL="0" indent="0">
-                <a:buNone/>
-              </a:pPr>
+              <a:pPr algn="l"/>
               <a:r>
-                <a:rPr lang="en-US" sz="1200" i="1" dirty="0">
+                <a:rPr sz="1100" b="1">
                   <a:solidFill>
-                    <a:srgbClr val="7A8793"/>
+                    <a:srgbClr val="003B7A"/>
                   </a:solidFill>
+                  <a:latin typeface="Aptos"/>
                 </a:rPr>
-                <a:t>[UNO Q / AI Playground / Other]</a:t>
+                <a:t>Qualcomm Cloud AI Playground</a:t>
               </a:r>
-              <a:endParaRPr lang="en-US" sz="1200" dirty="0"/>
             </a:p>
           </p:txBody>
         </p:sp>
@@ -2579,41 +2504,123 @@
           <a:ln/>
         </p:spPr>
         <p:txBody>
-          <a:bodyPr wrap="square" lIns="254" tIns="254" rIns="254" bIns="254" rtlCol="0" anchor="ctr">
+          <a:bodyPr wrap="square" lIns="36576" tIns="36576" rIns="36576" bIns="36576" rtlCol="0" anchor="ctr">
             <a:normAutofit/>
           </a:bodyPr>
+          <a:lstStyle/>
+          <a:p>
+            <a:pPr algn="l"/>
+            <a:r>
+              <a:rPr sz="1150" b="0">
+                <a:solidFill>
+                  <a:srgbClr val="0F172A"/>
+                </a:solidFill>
+                <a:latin typeface="Aptos"/>
+              </a:rPr>
+              <a:t>Convert unstructured, messy meeting transcripts into structured decisions, accountable action items, designated owners, unambiguous due dates, and project risks.</a:t>
+            </a:r>
+          </a:p>
+        </p:txBody>
+      </p:sp>
+      <p:sp>
+        <p:nvSpPr>
+          <p:cNvPr id="11" name="Text 9">
+            <a:extLst>
+              <a:ext uri="{FF2B5EF4-FFF2-40B4-BE49-F238E27FC236}">
+                <a16:creationId xmlns:a16="http://schemas.microsoft.com/office/drawing/2014/main" id="{E871A307-2145-F941-36B5-7FB8E48AF6A3}"/>
+              </a:ext>
+            </a:extLst>
+          </p:cNvPr>
+          <p:cNvSpPr/>
+          <p:nvPr/>
+        </p:nvSpPr>
+        <p:spPr>
+          <a:xfrm>
+            <a:off x="7735824" y="1243584"/>
+            <a:ext cx="3803904" cy="164592"/>
+          </a:xfrm>
+          <a:prstGeom prst="rect">
+            <a:avLst/>
+          </a:prstGeom>
+          <a:noFill/>
+          <a:ln/>
+        </p:spPr>
+        <p:txBody>
+          <a:bodyPr wrap="square" lIns="0" tIns="0" rIns="0" bIns="0" rtlCol="0" anchor="ctr"/>
           <a:lstStyle/>
           <a:p>
             <a:pPr marL="0" indent="0">
               <a:buNone/>
             </a:pPr>
             <a:r>
-              <a:rPr sz="1050">
-                <a:solidFill>
-                  <a:srgbClr val="1E293B"/>
-                </a:solidFill>
-              </a:rPr>
-              <a:t>Convert unstructured, messy meeting transcripts into structured decisions, accountable action items, designated owners, unambiguous due dates, and project risks.</a:t>
-            </a:r>
-            <a:endParaRPr lang="en-US" sz="1900" dirty="0"/>
-          </a:p>
-        </p:txBody>
-      </p:sp>
-      <p:sp>
-        <p:nvSpPr>
-          <p:cNvPr id="11" name="Text 9">
-            <a:extLst>
-              <a:ext uri="{FF2B5EF4-FFF2-40B4-BE49-F238E27FC236}">
-                <a16:creationId xmlns:a16="http://schemas.microsoft.com/office/drawing/2014/main" id="{E871A307-2145-F941-36B5-7FB8E48AF6A3}"/>
-              </a:ext>
-            </a:extLst>
-          </p:cNvPr>
-          <p:cNvSpPr/>
-          <p:nvPr/>
-        </p:nvSpPr>
-        <p:spPr>
-          <a:xfrm>
-            <a:off x="7735824" y="1243584"/>
+              <a:rPr lang="en-US" sz="850" b="1" kern="0" spc="70" dirty="0">
+                <a:solidFill>
+                  <a:srgbClr val="F28C28"/>
+                </a:solidFill>
+              </a:rPr>
+              <a:t>WHO IS AFFECTED?</a:t>
+            </a:r>
+            <a:endParaRPr lang="en-US" sz="850" dirty="0"/>
+          </a:p>
+        </p:txBody>
+      </p:sp>
+      <p:sp>
+        <p:nvSpPr>
+          <p:cNvPr id="13" name="Text 10">
+            <a:extLst>
+              <a:ext uri="{FF2B5EF4-FFF2-40B4-BE49-F238E27FC236}">
+                <a16:creationId xmlns:a16="http://schemas.microsoft.com/office/drawing/2014/main" id="{0E1E736B-0A2D-B024-1EB0-12A200895AC2}"/>
+              </a:ext>
+            </a:extLst>
+          </p:cNvPr>
+          <p:cNvSpPr/>
+          <p:nvPr/>
+        </p:nvSpPr>
+        <p:spPr>
+          <a:xfrm>
+            <a:off x="7735824" y="1508760"/>
+            <a:ext cx="3803904" cy="402336"/>
+          </a:xfrm>
+          <a:prstGeom prst="rect">
+            <a:avLst/>
+          </a:prstGeom>
+          <a:noFill/>
+          <a:ln/>
+        </p:spPr>
+        <p:txBody>
+          <a:bodyPr wrap="square" lIns="36576" tIns="36576" rIns="36576" bIns="36576" rtlCol="0" anchor="ctr">
+            <a:normAutofit/>
+          </a:bodyPr>
+          <a:lstStyle/>
+          <a:p>
+            <a:pPr algn="l"/>
+            <a:r>
+              <a:rPr sz="1050" b="0">
+                <a:solidFill>
+                  <a:srgbClr val="0F172A"/>
+                </a:solidFill>
+                <a:latin typeface="Aptos"/>
+              </a:rPr>
+              <a:t>Engineering teams, sprint leads, project managers, scrum masters, and enterprise stakeholders.</a:t>
+            </a:r>
+          </a:p>
+        </p:txBody>
+      </p:sp>
+      <p:sp>
+        <p:nvSpPr>
+          <p:cNvPr id="15" name="Text 12">
+            <a:extLst>
+              <a:ext uri="{FF2B5EF4-FFF2-40B4-BE49-F238E27FC236}">
+                <a16:creationId xmlns:a16="http://schemas.microsoft.com/office/drawing/2014/main" id="{9073DFEC-DABB-CC2B-0BA9-871FADDBD8B2}"/>
+              </a:ext>
+            </a:extLst>
+          </p:cNvPr>
+          <p:cNvSpPr/>
+          <p:nvPr/>
+        </p:nvSpPr>
+        <p:spPr>
+          <a:xfrm>
+            <a:off x="7735824" y="2340864"/>
             <a:ext cx="3803904" cy="164592"/>
           </a:xfrm>
           <a:prstGeom prst="rect">
@@ -2632,10 +2639,10 @@
             <a:r>
               <a:rPr lang="en-US" sz="850" b="1" kern="0" spc="70" dirty="0">
                 <a:solidFill>
-                  <a:srgbClr val="F28C28"/>
-                </a:solidFill>
-              </a:rPr>
-              <a:t>WHO IS AFFECTED?</a:t>
+                  <a:srgbClr val="63A845"/>
+                </a:solidFill>
+              </a:rPr>
+              <a:t>WHY DOES IT MATTER?</a:t>
             </a:r>
             <a:endParaRPr lang="en-US" sz="850" dirty="0"/>
           </a:p>
@@ -2643,19 +2650,19 @@
       </p:sp>
       <p:sp>
         <p:nvSpPr>
-          <p:cNvPr id="13" name="Text 10">
-            <a:extLst>
-              <a:ext uri="{FF2B5EF4-FFF2-40B4-BE49-F238E27FC236}">
-                <a16:creationId xmlns:a16="http://schemas.microsoft.com/office/drawing/2014/main" id="{0E1E736B-0A2D-B024-1EB0-12A200895AC2}"/>
-              </a:ext>
-            </a:extLst>
-          </p:cNvPr>
-          <p:cNvSpPr/>
-          <p:nvPr/>
-        </p:nvSpPr>
-        <p:spPr>
-          <a:xfrm>
-            <a:off x="7735824" y="1508760"/>
+          <p:cNvPr id="17" name="Text 13">
+            <a:extLst>
+              <a:ext uri="{FF2B5EF4-FFF2-40B4-BE49-F238E27FC236}">
+                <a16:creationId xmlns:a16="http://schemas.microsoft.com/office/drawing/2014/main" id="{42C115EF-03A4-A284-3C57-500DFF669693}"/>
+              </a:ext>
+            </a:extLst>
+          </p:cNvPr>
+          <p:cNvSpPr/>
+          <p:nvPr/>
+        </p:nvSpPr>
+        <p:spPr>
+          <a:xfrm>
+            <a:off x="7735824" y="2606040"/>
             <a:ext cx="3803904" cy="402336"/>
           </a:xfrm>
           <a:prstGeom prst="rect">
@@ -2665,42 +2672,124 @@
           <a:ln/>
         </p:spPr>
         <p:txBody>
-          <a:bodyPr wrap="square" lIns="254" tIns="254" rIns="254" bIns="254" rtlCol="0" anchor="ctr">
+          <a:bodyPr wrap="square" lIns="36576" tIns="36576" rIns="36576" bIns="36576" rtlCol="0" anchor="ctr">
             <a:normAutofit/>
           </a:bodyPr>
+          <a:lstStyle/>
+          <a:p>
+            <a:pPr algn="l"/>
+            <a:r>
+              <a:rPr sz="950" b="0">
+                <a:solidFill>
+                  <a:srgbClr val="0F172A"/>
+                </a:solidFill>
+                <a:latin typeface="Aptos"/>
+              </a:rPr>
+              <a:t>30%+ of employee time is spent in meetings. Up to 40% of deliverables are delayed or lost because meeting notes lack explicit owners, timelines are vague ('soon'), or casual proposals are mistaken for agreements.</a:t>
+            </a:r>
+          </a:p>
+        </p:txBody>
+      </p:sp>
+      <p:sp>
+        <p:nvSpPr>
+          <p:cNvPr id="19" name="Text 15">
+            <a:extLst>
+              <a:ext uri="{FF2B5EF4-FFF2-40B4-BE49-F238E27FC236}">
+                <a16:creationId xmlns:a16="http://schemas.microsoft.com/office/drawing/2014/main" id="{6F43253D-9704-E340-ABBE-3C6F52C216CD}"/>
+              </a:ext>
+            </a:extLst>
+          </p:cNvPr>
+          <p:cNvSpPr/>
+          <p:nvPr/>
+        </p:nvSpPr>
+        <p:spPr>
+          <a:xfrm>
+            <a:off x="713232" y="2706624"/>
+            <a:ext cx="2889504" cy="164592"/>
+          </a:xfrm>
+          <a:prstGeom prst="rect">
+            <a:avLst/>
+          </a:prstGeom>
+          <a:noFill/>
+          <a:ln/>
+        </p:spPr>
+        <p:txBody>
+          <a:bodyPr wrap="square" lIns="0" tIns="0" rIns="0" bIns="0" rtlCol="0" anchor="ctr"/>
           <a:lstStyle/>
           <a:p>
             <a:pPr marL="0" indent="0">
               <a:buNone/>
             </a:pPr>
             <a:r>
-              <a:rPr sz="1050">
-                <a:solidFill>
-                  <a:srgbClr val="1E293B"/>
-                </a:solidFill>
-              </a:rPr>
-              <a:t>Engineering teams, sprint leads, project managers, scrum masters, and enterprise stakeholders.</a:t>
-            </a:r>
-            <a:endParaRPr lang="en-US" sz="1200" dirty="0"/>
-          </a:p>
-        </p:txBody>
-      </p:sp>
-      <p:sp>
-        <p:nvSpPr>
-          <p:cNvPr id="15" name="Text 12">
-            <a:extLst>
-              <a:ext uri="{FF2B5EF4-FFF2-40B4-BE49-F238E27FC236}">
-                <a16:creationId xmlns:a16="http://schemas.microsoft.com/office/drawing/2014/main" id="{9073DFEC-DABB-CC2B-0BA9-871FADDBD8B2}"/>
-              </a:ext>
-            </a:extLst>
-          </p:cNvPr>
-          <p:cNvSpPr/>
-          <p:nvPr/>
-        </p:nvSpPr>
-        <p:spPr>
-          <a:xfrm>
-            <a:off x="7735824" y="2340864"/>
-            <a:ext cx="3803904" cy="164592"/>
+              <a:rPr lang="en-US" sz="850" b="1" kern="0" spc="70" dirty="0">
+                <a:solidFill>
+                  <a:srgbClr val="007CC3"/>
+                </a:solidFill>
+              </a:rPr>
+              <a:t>CURRENT GAP / PAIN POINT</a:t>
+            </a:r>
+            <a:endParaRPr lang="en-US" sz="850" dirty="0"/>
+          </a:p>
+        </p:txBody>
+      </p:sp>
+      <p:sp>
+        <p:nvSpPr>
+          <p:cNvPr id="21" name="Text 16">
+            <a:extLst>
+              <a:ext uri="{FF2B5EF4-FFF2-40B4-BE49-F238E27FC236}">
+                <a16:creationId xmlns:a16="http://schemas.microsoft.com/office/drawing/2014/main" id="{4B3CD632-0098-5E4B-5432-77CD2893CAF3}"/>
+              </a:ext>
+            </a:extLst>
+          </p:cNvPr>
+          <p:cNvSpPr/>
+          <p:nvPr/>
+        </p:nvSpPr>
+        <p:spPr>
+          <a:xfrm>
+            <a:off x="713232" y="2971800"/>
+            <a:ext cx="2889504" cy="832104"/>
+          </a:xfrm>
+          <a:prstGeom prst="rect">
+            <a:avLst/>
+          </a:prstGeom>
+          <a:noFill/>
+          <a:ln/>
+        </p:spPr>
+        <p:txBody>
+          <a:bodyPr wrap="square" lIns="36576" tIns="36576" rIns="36576" bIns="36576" rtlCol="0" anchor="ctr">
+            <a:normAutofit/>
+          </a:bodyPr>
+          <a:lstStyle/>
+          <a:p>
+            <a:pPr algn="l"/>
+            <a:r>
+              <a:rPr sz="950" b="0">
+                <a:solidFill>
+                  <a:srgbClr val="0F172A"/>
+                </a:solidFill>
+                <a:latin typeface="Aptos"/>
+              </a:rPr>
+              <a:t>Existing AI tools provide passive narrative summaries. When forced to extract tasks, standard LLMs hallucinate owners who never volunteered, fabricate calendar dates, and smooth over unconfirmed commitments.</a:t>
+            </a:r>
+          </a:p>
+        </p:txBody>
+      </p:sp>
+      <p:sp>
+        <p:nvSpPr>
+          <p:cNvPr id="23" name="Text 18">
+            <a:extLst>
+              <a:ext uri="{FF2B5EF4-FFF2-40B4-BE49-F238E27FC236}">
+                <a16:creationId xmlns:a16="http://schemas.microsoft.com/office/drawing/2014/main" id="{05F37750-2660-1AD0-F71B-75255FDEFAB9}"/>
+              </a:ext>
+            </a:extLst>
+          </p:cNvPr>
+          <p:cNvSpPr/>
+          <p:nvPr/>
+        </p:nvSpPr>
+        <p:spPr>
+          <a:xfrm>
+            <a:off x="4123944" y="2706624"/>
+            <a:ext cx="3072384" cy="164592"/>
           </a:xfrm>
           <a:prstGeom prst="rect">
             <a:avLst/>
@@ -2718,10 +2807,10 @@
             <a:r>
               <a:rPr lang="en-US" sz="850" b="1" kern="0" spc="70" dirty="0">
                 <a:solidFill>
-                  <a:srgbClr val="63A845"/>
-                </a:solidFill>
-              </a:rPr>
-              <a:t>WHY DOES IT MATTER?</a:t>
+                  <a:srgbClr val="F28C28"/>
+                </a:solidFill>
+              </a:rPr>
+              <a:t>EVIDENCE / SCENARIO</a:t>
             </a:r>
             <a:endParaRPr lang="en-US" sz="850" dirty="0"/>
           </a:p>
@@ -2729,20 +2818,20 @@
       </p:sp>
       <p:sp>
         <p:nvSpPr>
-          <p:cNvPr id="17" name="Text 13">
-            <a:extLst>
-              <a:ext uri="{FF2B5EF4-FFF2-40B4-BE49-F238E27FC236}">
-                <a16:creationId xmlns:a16="http://schemas.microsoft.com/office/drawing/2014/main" id="{42C115EF-03A4-A284-3C57-500DFF669693}"/>
-              </a:ext>
-            </a:extLst>
-          </p:cNvPr>
-          <p:cNvSpPr/>
-          <p:nvPr/>
-        </p:nvSpPr>
-        <p:spPr>
-          <a:xfrm>
-            <a:off x="7735824" y="2606040"/>
-            <a:ext cx="3803904" cy="402336"/>
+          <p:cNvPr id="25" name="Text 19">
+            <a:extLst>
+              <a:ext uri="{FF2B5EF4-FFF2-40B4-BE49-F238E27FC236}">
+                <a16:creationId xmlns:a16="http://schemas.microsoft.com/office/drawing/2014/main" id="{824B9B85-9810-1D16-1FED-578C00F4DF52}"/>
+              </a:ext>
+            </a:extLst>
+          </p:cNvPr>
+          <p:cNvSpPr/>
+          <p:nvPr/>
+        </p:nvSpPr>
+        <p:spPr>
+          <a:xfrm>
+            <a:off x="4123944" y="2971800"/>
+            <a:ext cx="3072384" cy="832104"/>
           </a:xfrm>
           <a:prstGeom prst="rect">
             <a:avLst/>
@@ -2751,42 +2840,82 @@
           <a:ln/>
         </p:spPr>
         <p:txBody>
-          <a:bodyPr wrap="square" lIns="254" tIns="254" rIns="254" bIns="254" rtlCol="0" anchor="ctr">
+          <a:bodyPr wrap="square" lIns="36576" tIns="36576" rIns="36576" bIns="36576" rtlCol="0" anchor="ctr">
             <a:normAutofit/>
           </a:bodyPr>
+          <a:lstStyle/>
+          <a:p>
+            <a:pPr algn="l"/>
+            <a:r>
+              <a:rPr sz="950" b="0">
+                <a:solidFill>
+                  <a:srgbClr val="0F172A"/>
+                </a:solidFill>
+                <a:latin typeface="Aptos"/>
+              </a:rPr>
+              <a:t>Real transcript: 'Priya may handle testing, but hasn't confirmed yet. Deployment plan needed soon.' Naive LLMs assign Priya as confirmed owner and invent a date, creating hidden project risk.</a:t>
+            </a:r>
+          </a:p>
+        </p:txBody>
+      </p:sp>
+      <p:sp>
+        <p:nvSpPr>
+          <p:cNvPr id="27" name="Text 21">
+            <a:extLst>
+              <a:ext uri="{FF2B5EF4-FFF2-40B4-BE49-F238E27FC236}">
+                <a16:creationId xmlns:a16="http://schemas.microsoft.com/office/drawing/2014/main" id="{C355BF79-944B-C7CD-13BE-B68144B0EC3D}"/>
+              </a:ext>
+            </a:extLst>
+          </p:cNvPr>
+          <p:cNvSpPr/>
+          <p:nvPr/>
+        </p:nvSpPr>
+        <p:spPr>
+          <a:xfrm>
+            <a:off x="7735824" y="3438144"/>
+            <a:ext cx="3803904" cy="164592"/>
+          </a:xfrm>
+          <a:prstGeom prst="rect">
+            <a:avLst/>
+          </a:prstGeom>
+          <a:noFill/>
+          <a:ln/>
+        </p:spPr>
+        <p:txBody>
+          <a:bodyPr wrap="square" lIns="0" tIns="0" rIns="0" bIns="0" rtlCol="0" anchor="ctr"/>
           <a:lstStyle/>
           <a:p>
             <a:pPr marL="0" indent="0">
               <a:buNone/>
             </a:pPr>
             <a:r>
-              <a:rPr sz="950">
-                <a:solidFill>
-                  <a:srgbClr val="1E293B"/>
-                </a:solidFill>
-              </a:rPr>
-              <a:t>30%+ of employee time is spent in meetings. Up to 40% of deliverables are delayed or lost because meeting notes lack explicit owners, timelines are ambiguous ('soon'), or casual proposals are mistaken for agreements.</a:t>
-            </a:r>
-            <a:endParaRPr lang="en-US" sz="1200" dirty="0"/>
-          </a:p>
-        </p:txBody>
-      </p:sp>
-      <p:sp>
-        <p:nvSpPr>
-          <p:cNvPr id="19" name="Text 15">
-            <a:extLst>
-              <a:ext uri="{FF2B5EF4-FFF2-40B4-BE49-F238E27FC236}">
-                <a16:creationId xmlns:a16="http://schemas.microsoft.com/office/drawing/2014/main" id="{6F43253D-9704-E340-ABBE-3C6F52C216CD}"/>
-              </a:ext>
-            </a:extLst>
-          </p:cNvPr>
-          <p:cNvSpPr/>
-          <p:nvPr/>
-        </p:nvSpPr>
-        <p:spPr>
-          <a:xfrm>
-            <a:off x="713232" y="2706624"/>
-            <a:ext cx="2889504" cy="164592"/>
+              <a:rPr lang="en-US" sz="850" b="1" kern="0" spc="70" dirty="0">
+                <a:solidFill>
+                  <a:srgbClr val="5417A8"/>
+                </a:solidFill>
+              </a:rPr>
+              <a:t>SUCCESS DEFINITION</a:t>
+            </a:r>
+            <a:endParaRPr lang="en-US" sz="850" dirty="0"/>
+          </a:p>
+        </p:txBody>
+      </p:sp>
+      <p:sp>
+        <p:nvSpPr>
+          <p:cNvPr id="29" name="Text 22">
+            <a:extLst>
+              <a:ext uri="{FF2B5EF4-FFF2-40B4-BE49-F238E27FC236}">
+                <a16:creationId xmlns:a16="http://schemas.microsoft.com/office/drawing/2014/main" id="{C74A84FE-3AA0-3CCB-062C-D940850ADC68}"/>
+              </a:ext>
+            </a:extLst>
+          </p:cNvPr>
+          <p:cNvSpPr/>
+          <p:nvPr/>
+        </p:nvSpPr>
+        <p:spPr>
+          <a:xfrm>
+            <a:off x="7735824" y="3703320"/>
+            <a:ext cx="3803904" cy="832104"/>
           </a:xfrm>
           <a:prstGeom prst="rect">
             <a:avLst/>
@@ -2795,264 +2924,57 @@
           <a:ln/>
         </p:spPr>
         <p:txBody>
-          <a:bodyPr wrap="square" lIns="0" tIns="0" rIns="0" bIns="0" rtlCol="0" anchor="ctr"/>
-          <a:lstStyle/>
-          <a:p>
-            <a:pPr marL="0" indent="0">
-              <a:buNone/>
-            </a:pPr>
-            <a:r>
-              <a:rPr lang="en-US" sz="850" b="1" kern="0" spc="70" dirty="0">
-                <a:solidFill>
-                  <a:srgbClr val="007CC3"/>
-                </a:solidFill>
-              </a:rPr>
-              <a:t>CURRENT GAP / PAIN POINT</a:t>
-            </a:r>
-            <a:endParaRPr lang="en-US" sz="850" dirty="0"/>
-          </a:p>
-        </p:txBody>
-      </p:sp>
-      <p:sp>
-        <p:nvSpPr>
-          <p:cNvPr id="21" name="Text 16">
-            <a:extLst>
-              <a:ext uri="{FF2B5EF4-FFF2-40B4-BE49-F238E27FC236}">
-                <a16:creationId xmlns:a16="http://schemas.microsoft.com/office/drawing/2014/main" id="{4B3CD632-0098-5E4B-5432-77CD2893CAF3}"/>
-              </a:ext>
-            </a:extLst>
-          </p:cNvPr>
-          <p:cNvSpPr/>
-          <p:nvPr/>
-        </p:nvSpPr>
-        <p:spPr>
-          <a:xfrm>
-            <a:off x="713232" y="2971800"/>
-            <a:ext cx="2889504" cy="832104"/>
-          </a:xfrm>
-          <a:prstGeom prst="rect">
-            <a:avLst/>
-          </a:prstGeom>
-          <a:noFill/>
-          <a:ln/>
-        </p:spPr>
-        <p:txBody>
-          <a:bodyPr wrap="square" lIns="254" tIns="254" rIns="254" bIns="254" rtlCol="0" anchor="ctr">
+          <a:bodyPr wrap="square" lIns="36576" tIns="36576" rIns="36576" bIns="36576" rtlCol="0" anchor="ctr">
             <a:normAutofit/>
           </a:bodyPr>
           <a:lstStyle/>
           <a:p>
-            <a:pPr marL="0" indent="0">
-              <a:buNone/>
-            </a:pPr>
-            <a:r>
-              <a:rPr sz="950">
-                <a:solidFill>
-                  <a:srgbClr val="1E293B"/>
-                </a:solidFill>
-              </a:rPr>
-              <a:t>Existing meeting AI tools provide passive narrative summaries. When forced to extract tasks, standard LLMs hallucinate owners who never volunteered, guess calendar dates, and smooth over unconfirmed commitments.</a:t>
-            </a:r>
-            <a:endParaRPr lang="en-US" sz="1200" dirty="0"/>
-          </a:p>
-        </p:txBody>
-      </p:sp>
-      <p:sp>
-        <p:nvSpPr>
-          <p:cNvPr id="23" name="Text 18">
-            <a:extLst>
-              <a:ext uri="{FF2B5EF4-FFF2-40B4-BE49-F238E27FC236}">
-                <a16:creationId xmlns:a16="http://schemas.microsoft.com/office/drawing/2014/main" id="{05F37750-2660-1AD0-F71B-75255FDEFAB9}"/>
-              </a:ext>
-            </a:extLst>
-          </p:cNvPr>
-          <p:cNvSpPr/>
-          <p:nvPr/>
-        </p:nvSpPr>
-        <p:spPr>
-          <a:xfrm>
-            <a:off x="4123944" y="2706624"/>
-            <a:ext cx="3072384" cy="164592"/>
-          </a:xfrm>
-          <a:prstGeom prst="rect">
-            <a:avLst/>
-          </a:prstGeom>
-          <a:noFill/>
-          <a:ln/>
-        </p:spPr>
-        <p:txBody>
-          <a:bodyPr wrap="square" lIns="0" tIns="0" rIns="0" bIns="0" rtlCol="0" anchor="ctr"/>
-          <a:lstStyle/>
-          <a:p>
-            <a:pPr marL="0" indent="0">
-              <a:buNone/>
-            </a:pPr>
-            <a:r>
-              <a:rPr lang="en-US" sz="850" b="1" kern="0" spc="70" dirty="0">
-                <a:solidFill>
-                  <a:srgbClr val="F28C28"/>
-                </a:solidFill>
-              </a:rPr>
-              <a:t>EVIDENCE / SCENARIO</a:t>
-            </a:r>
-            <a:endParaRPr lang="en-US" sz="850" dirty="0"/>
-          </a:p>
-        </p:txBody>
-      </p:sp>
-      <p:sp>
-        <p:nvSpPr>
-          <p:cNvPr id="25" name="Text 19">
-            <a:extLst>
-              <a:ext uri="{FF2B5EF4-FFF2-40B4-BE49-F238E27FC236}">
-                <a16:creationId xmlns:a16="http://schemas.microsoft.com/office/drawing/2014/main" id="{824B9B85-9810-1D16-1FED-578C00F4DF52}"/>
-              </a:ext>
-            </a:extLst>
-          </p:cNvPr>
-          <p:cNvSpPr/>
-          <p:nvPr/>
-        </p:nvSpPr>
-        <p:spPr>
-          <a:xfrm>
-            <a:off x="4123944" y="2971800"/>
-            <a:ext cx="3072384" cy="832104"/>
-          </a:xfrm>
-          <a:prstGeom prst="rect">
-            <a:avLst/>
-          </a:prstGeom>
-          <a:noFill/>
-          <a:ln/>
-        </p:spPr>
-        <p:txBody>
-          <a:bodyPr wrap="square" lIns="254" tIns="254" rIns="254" bIns="254" rtlCol="0" anchor="ctr">
-            <a:normAutofit/>
-          </a:bodyPr>
-          <a:lstStyle/>
-          <a:p>
-            <a:pPr marL="0" indent="0">
-              <a:buNone/>
-            </a:pPr>
-            <a:r>
-              <a:rPr sz="950">
-                <a:solidFill>
-                  <a:srgbClr val="D97706"/>
-                </a:solidFill>
-              </a:rPr>
-              <a:t>Real transcript: 'Priya may handle testing, but hasn't confirmed yet. Deployment plan needed soon.' Naive LLMs assign Priya as confirmed owner and invent a date, creating hidden project risk.</a:t>
-            </a:r>
-            <a:endParaRPr lang="en-US" sz="1200" dirty="0"/>
-          </a:p>
-        </p:txBody>
-      </p:sp>
-      <p:sp>
-        <p:nvSpPr>
-          <p:cNvPr id="27" name="Text 21">
-            <a:extLst>
-              <a:ext uri="{FF2B5EF4-FFF2-40B4-BE49-F238E27FC236}">
-                <a16:creationId xmlns:a16="http://schemas.microsoft.com/office/drawing/2014/main" id="{C355BF79-944B-C7CD-13BE-B68144B0EC3D}"/>
-              </a:ext>
-            </a:extLst>
-          </p:cNvPr>
-          <p:cNvSpPr/>
-          <p:nvPr/>
-        </p:nvSpPr>
-        <p:spPr>
-          <a:xfrm>
-            <a:off x="7735824" y="3438144"/>
-            <a:ext cx="3803904" cy="164592"/>
-          </a:xfrm>
-          <a:prstGeom prst="rect">
-            <a:avLst/>
-          </a:prstGeom>
-          <a:noFill/>
-          <a:ln/>
-        </p:spPr>
-        <p:txBody>
-          <a:bodyPr wrap="square" lIns="0" tIns="0" rIns="0" bIns="0" rtlCol="0" anchor="ctr"/>
-          <a:lstStyle/>
-          <a:p>
-            <a:pPr marL="0" indent="0">
-              <a:buNone/>
-            </a:pPr>
-            <a:r>
-              <a:rPr lang="en-US" sz="850" b="1" kern="0" spc="70" dirty="0">
-                <a:solidFill>
-                  <a:srgbClr val="5417A8"/>
-                </a:solidFill>
-              </a:rPr>
-              <a:t>SUCCESS DEFINITION</a:t>
-            </a:r>
-            <a:endParaRPr lang="en-US" sz="850" dirty="0"/>
-          </a:p>
-        </p:txBody>
-      </p:sp>
-      <p:sp>
-        <p:nvSpPr>
-          <p:cNvPr id="29" name="Text 22">
-            <a:extLst>
-              <a:ext uri="{FF2B5EF4-FFF2-40B4-BE49-F238E27FC236}">
-                <a16:creationId xmlns:a16="http://schemas.microsoft.com/office/drawing/2014/main" id="{C74A84FE-3AA0-3CCB-062C-D940850ADC68}"/>
-              </a:ext>
-            </a:extLst>
-          </p:cNvPr>
-          <p:cNvSpPr/>
-          <p:nvPr/>
-        </p:nvSpPr>
-        <p:spPr>
-          <a:xfrm>
-            <a:off x="7735824" y="3703320"/>
-            <a:ext cx="3803904" cy="832104"/>
-          </a:xfrm>
-          <a:prstGeom prst="rect">
-            <a:avLst/>
-          </a:prstGeom>
-          <a:noFill/>
-          <a:ln/>
-        </p:spPr>
-        <p:txBody>
-          <a:bodyPr wrap="square" lIns="254" tIns="254" rIns="254" bIns="254" rtlCol="0" anchor="ctr">
-            <a:normAutofit/>
-          </a:bodyPr>
-          <a:lstStyle/>
-          <a:p>
-            <a:pPr marL="0" indent="0">
-              <a:buNone/>
-            </a:pPr>
-            <a:r>
-              <a:rPr sz="950">
-                <a:solidFill>
-                  <a:srgbClr val="16A34A"/>
-                </a:solidFill>
+            <a:pPr algn="l"/>
+            <a:r>
+              <a:rPr sz="950" b="0">
+                <a:solidFill>
+                  <a:srgbClr val="0F172A"/>
+                </a:solidFill>
+                <a:latin typeface="Aptos"/>
               </a:rPr>
               <a:t>1. Verbatim extraction of confirmed tasks.</a:t>
             </a:r>
-            <a:br/>
-            <a:r>
-              <a:rPr sz="950">
-                <a:solidFill>
-                  <a:srgbClr val="16A34A"/>
-                </a:solidFill>
+          </a:p>
+          <a:p>
+            <a:pPr algn="l"/>
+            <a:r>
+              <a:rPr sz="950" b="0">
+                <a:solidFill>
+                  <a:srgbClr val="0F172A"/>
+                </a:solidFill>
+                <a:latin typeface="Aptos"/>
               </a:rPr>
               <a:t>2. Explicit null-handling for missing data (never guessing).</a:t>
             </a:r>
-            <a:br/>
-            <a:r>
-              <a:rPr sz="950">
-                <a:solidFill>
-                  <a:srgbClr val="16A34A"/>
-                </a:solidFill>
+          </a:p>
+          <a:p>
+            <a:pPr algn="l"/>
+            <a:r>
+              <a:rPr sz="950" b="0">
+                <a:solidFill>
+                  <a:srgbClr val="0F172A"/>
+                </a:solidFill>
+                <a:latin typeface="Aptos"/>
               </a:rPr>
               <a:t>3. Deterministic flags with targeted clarification questions.</a:t>
             </a:r>
-            <a:br/>
-            <a:r>
-              <a:rPr sz="950">
-                <a:solidFill>
-                  <a:srgbClr val="16A34A"/>
-                </a:solidFill>
+          </a:p>
+          <a:p>
+            <a:pPr algn="l"/>
+            <a:r>
+              <a:rPr sz="950" b="0">
+                <a:solidFill>
+                  <a:srgbClr val="0F172A"/>
+                </a:solidFill>
+                <a:latin typeface="Aptos"/>
               </a:rPr>
               <a:t>4. RFC-compliant Jira/Asana CSV and JSON export.</a:t>
             </a:r>
-            <a:endParaRPr lang="en-US" sz="1200" dirty="0"/>
           </a:p>
         </p:txBody>
       </p:sp>
@@ -3280,23 +3202,21 @@
           <a:ln/>
         </p:spPr>
         <p:txBody>
-          <a:bodyPr wrap="square" lIns="254" tIns="254" rIns="254" bIns="254" rtlCol="0" anchor="ctr">
+          <a:bodyPr wrap="square" lIns="36576" tIns="36576" rIns="36576" bIns="36576" rtlCol="0" anchor="ctr">
             <a:normAutofit lnSpcReduction="10000"/>
           </a:bodyPr>
           <a:lstStyle/>
           <a:p>
-            <a:pPr marL="0" indent="0">
-              <a:buNone/>
-            </a:pPr>
+            <a:pPr algn="l"/>
             <a:r>
               <a:rPr sz="1100" b="1">
                 <a:solidFill>
-                  <a:srgbClr val="4F46E5"/>
-                </a:solidFill>
+                  <a:srgbClr val="003B7A"/>
+                </a:solidFill>
+                <a:latin typeface="Aptos"/>
               </a:rPr>
               <a:t>Our solution uses Qualcomm Cloud AI and a deterministic Python validation engine to help engineering teams extract accountable action items from messy notes with zero hallucination.</a:t>
             </a:r>
-            <a:endParaRPr lang="en-US" sz="1900" dirty="0"/>
           </a:p>
         </p:txBody>
       </p:sp>
@@ -3488,33 +3408,36 @@
           <a:ln/>
         </p:spPr>
         <p:txBody>
-          <a:bodyPr wrap="square" lIns="381" tIns="381" rIns="381" bIns="381" rtlCol="0" anchor="ctr">
+          <a:bodyPr wrap="square" lIns="36576" tIns="36576" rIns="36576" bIns="36576" rtlCol="0" anchor="ctr">
             <a:normAutofit/>
           </a:bodyPr>
           <a:lstStyle/>
           <a:p>
-            <a:pPr marL="0" indent="0">
-              <a:buNone/>
-            </a:pPr>
-            <a:r>
-              <a:rPr sz="950">
-                <a:solidFill>
-                  <a:srgbClr val="1E293B"/>
-                </a:solidFill>
-              </a:rPr>
-              <a:t>Raw unstructured meeting notes, voice transcripts, or bullet points pasted into the web dashboard (with optional title &amp; date).</a:t>
-            </a:r>
-            <a:br/>
-            <a:br/>
-            <a:r>
-              <a:rPr sz="950">
-                <a:solidFill>
-                  <a:srgbClr val="1E293B"/>
-                </a:solidFill>
-              </a:rPr>
-              <a:t>• 1-Click bundled benchmark notes for immediate evaluation.</a:t>
-            </a:r>
-            <a:endParaRPr lang="en-US" sz="1300" dirty="0"/>
+            <a:pPr algn="l"/>
+            <a:r>
+              <a:rPr sz="950" b="0">
+                <a:solidFill>
+                  <a:srgbClr val="0F172A"/>
+                </a:solidFill>
+                <a:latin typeface="Aptos"/>
+              </a:rPr>
+              <a:t>Raw unstructured meeting notes, voice transcripts, or bullet points pasted into the web dashboard.</a:t>
+            </a:r>
+          </a:p>
+          <a:p>
+            <a:pPr algn="l"/>
+          </a:p>
+          <a:p>
+            <a:pPr algn="l"/>
+            <a:r>
+              <a:rPr sz="950" b="0">
+                <a:solidFill>
+                  <a:srgbClr val="0F172A"/>
+                </a:solidFill>
+                <a:latin typeface="Aptos"/>
+              </a:rPr>
+              <a:t>• Includes 1-Click bundled benchmark notes for immediate evaluation.</a:t>
+            </a:r>
           </a:p>
         </p:txBody>
       </p:sp>
@@ -3748,41 +3671,45 @@
           <a:ln/>
         </p:spPr>
         <p:txBody>
-          <a:bodyPr wrap="square" lIns="381" tIns="381" rIns="381" bIns="381" rtlCol="0" anchor="ctr">
+          <a:bodyPr wrap="square" lIns="36576" tIns="36576" rIns="36576" bIns="36576" rtlCol="0" anchor="ctr">
             <a:normAutofit/>
           </a:bodyPr>
           <a:lstStyle/>
           <a:p>
-            <a:pPr marL="0" indent="0">
-              <a:buNone/>
-            </a:pPr>
-            <a:r>
-              <a:rPr sz="950">
-                <a:solidFill>
-                  <a:srgbClr val="1E293B"/>
-                </a:solidFill>
+            <a:pPr algn="l"/>
+            <a:r>
+              <a:rPr sz="950" b="0">
+                <a:solidFill>
+                  <a:srgbClr val="0F172A"/>
+                </a:solidFill>
+                <a:latin typeface="Aptos"/>
               </a:rPr>
               <a:t>Dual-Layer Processing:</a:t>
             </a:r>
-            <a:br/>
-            <a:r>
-              <a:rPr sz="950">
-                <a:solidFill>
-                  <a:srgbClr val="1E293B"/>
-                </a:solidFill>
+          </a:p>
+          <a:p>
+            <a:pPr algn="l"/>
+            <a:r>
+              <a:rPr sz="950" b="0">
+                <a:solidFill>
+                  <a:srgbClr val="0F172A"/>
+                </a:solidFill>
+                <a:latin typeface="Aptos"/>
               </a:rPr>
               <a:t>1. Qualcomm Cloud AI extracts entities backed by verbatim evidence quotes.</a:t>
             </a:r>
-            <a:br/>
-            <a:r>
-              <a:rPr sz="950">
-                <a:solidFill>
-                  <a:srgbClr val="1E293B"/>
-                </a:solidFill>
+          </a:p>
+          <a:p>
+            <a:pPr algn="l"/>
+            <a:r>
+              <a:rPr sz="950" b="0">
+                <a:solidFill>
+                  <a:srgbClr val="0F172A"/>
+                </a:solidFill>
+                <a:latin typeface="Aptos"/>
               </a:rPr>
               <a:t>2. Deterministic Python engine audits missing owners, deadlines, tentative flags, and vague words.</a:t>
             </a:r>
-            <a:endParaRPr lang="en-US" sz="1300" dirty="0"/>
           </a:p>
         </p:txBody>
       </p:sp>
@@ -4016,23 +3943,21 @@
           <a:ln/>
         </p:spPr>
         <p:txBody>
-          <a:bodyPr wrap="square" lIns="381" tIns="381" rIns="381" bIns="381" rtlCol="0" anchor="ctr">
+          <a:bodyPr wrap="square" lIns="36576" tIns="36576" rIns="36576" bIns="36576" rtlCol="0" anchor="ctr">
             <a:normAutofit/>
           </a:bodyPr>
           <a:lstStyle/>
           <a:p>
-            <a:pPr marL="0" indent="0">
-              <a:buNone/>
-            </a:pPr>
-            <a:r>
-              <a:rPr sz="950">
-                <a:solidFill>
-                  <a:srgbClr val="1E293B"/>
-                </a:solidFill>
+            <a:pPr algn="l"/>
+            <a:r>
+              <a:rPr sz="950" b="0">
+                <a:solidFill>
+                  <a:srgbClr val="0F172A"/>
+                </a:solidFill>
+                <a:latin typeface="Aptos"/>
               </a:rPr>
               <a:t>Interactive Action Table with in-session triage, Decisions vs Proposals breakdown, targeted Clarification Questions, and 1-click Jira/Asana CSV &amp; JSON exports.</a:t>
             </a:r>
-            <a:endParaRPr lang="en-US" sz="1300" dirty="0"/>
           </a:p>
         </p:txBody>
       </p:sp>
@@ -4091,8 +4016,8 @@
         </p:nvSpPr>
         <p:spPr>
           <a:xfrm>
-            <a:off x="713232" y="4517136"/>
-            <a:ext cx="10826496" cy="164592"/>
+            <a:off x="713232" y="4462272"/>
+            <a:ext cx="10826496" cy="438912"/>
           </a:xfrm>
           <a:prstGeom prst="rect">
             <a:avLst/>
@@ -4101,21 +4026,19 @@
           <a:ln/>
         </p:spPr>
         <p:txBody>
-          <a:bodyPr wrap="square" lIns="0" tIns="0" rIns="0" bIns="0" rtlCol="0" anchor="ctr"/>
-          <a:lstStyle/>
-          <a:p>
-            <a:pPr marL="0" indent="0">
-              <a:buNone/>
-            </a:pPr>
+          <a:bodyPr wrap="square" lIns="36576" tIns="36576" rIns="36576" bIns="36576" rtlCol="0" anchor="ctr"/>
+          <a:lstStyle/>
+          <a:p>
+            <a:pPr algn="l"/>
             <a:r>
               <a:rPr sz="1000" b="1">
                 <a:solidFill>
-                  <a:srgbClr val="16A34A"/>
-                </a:solidFill>
-              </a:rPr>
-              <a:t>KEY VALUE / DIFFERENTIATOR: The 'Anti-Hallucination' Accountability Engine — Strictly grounds tasks in verbatim quotes, refuses to invent missing data, and auto-generates targeted clarification questions.</a:t>
-            </a:r>
-            <a:endParaRPr lang="en-US" sz="850" dirty="0"/>
+                  <a:srgbClr val="003B7A"/>
+                </a:solidFill>
+                <a:latin typeface="Aptos"/>
+              </a:rPr>
+              <a:t>KEY VALUE / DIFFERENTIATOR: The Anti-Hallucination Engine — Strictly grounds tasks in verbatim quotes, refuses to invent missing data, and auto-generates targeted clarification questions.</a:t>
+            </a:r>
           </a:p>
         </p:txBody>
       </p:sp>
@@ -4717,23 +4640,21 @@
           <a:ln/>
         </p:spPr>
         <p:txBody>
-          <a:bodyPr wrap="square" lIns="254" tIns="254" rIns="254" bIns="254" rtlCol="0" anchor="ctr">
+          <a:bodyPr wrap="square" lIns="36576" tIns="36576" rIns="36576" bIns="36576" rtlCol="0" anchor="ctr">
             <a:normAutofit/>
           </a:bodyPr>
           <a:lstStyle/>
           <a:p>
-            <a:pPr marL="0" indent="0" algn="ctr">
-              <a:buNone/>
-            </a:pPr>
-            <a:r>
-              <a:rPr sz="900">
-                <a:solidFill>
-                  <a:srgbClr val="1E293B"/>
-                </a:solidFill>
+            <a:pPr algn="l"/>
+            <a:r>
+              <a:rPr sz="900" b="0">
+                <a:solidFill>
+                  <a:srgbClr val="0F172A"/>
+                </a:solidFill>
+                <a:latin typeface="Aptos"/>
               </a:rPr>
               <a:t>Web Browser / Engineering Team / Project Lead accessing Streamlit SaaS Dashboard</a:t>
             </a:r>
-            <a:endParaRPr lang="en-US" sz="1150" dirty="0"/>
           </a:p>
         </p:txBody>
       </p:sp>
@@ -4882,23 +4803,21 @@
           <a:ln/>
         </p:spPr>
         <p:txBody>
-          <a:bodyPr wrap="square" lIns="254" tIns="254" rIns="254" bIns="254" rtlCol="0" anchor="ctr">
+          <a:bodyPr wrap="square" lIns="36576" tIns="36576" rIns="36576" bIns="36576" rtlCol="0" anchor="ctr">
             <a:normAutofit/>
           </a:bodyPr>
           <a:lstStyle/>
           <a:p>
-            <a:pPr marL="0" indent="0" algn="ctr">
-              <a:buNone/>
-            </a:pPr>
-            <a:r>
-              <a:rPr sz="900">
-                <a:solidFill>
-                  <a:srgbClr val="1E293B"/>
-                </a:solidFill>
+            <a:pPr algn="l"/>
+            <a:r>
+              <a:rPr sz="900" b="0">
+                <a:solidFill>
+                  <a:srgbClr val="0F172A"/>
+                </a:solidFill>
+                <a:latin typeface="Aptos"/>
               </a:rPr>
               <a:t>Streamlit UI (v1.42+), Pydantic v2 validation contracts, Session State triage, and Pandas tabular pipeline</a:t>
             </a:r>
-            <a:endParaRPr lang="en-US" sz="1150" dirty="0"/>
           </a:p>
         </p:txBody>
       </p:sp>
@@ -5047,23 +4966,21 @@
           <a:ln/>
         </p:spPr>
         <p:txBody>
-          <a:bodyPr wrap="square" lIns="254" tIns="254" rIns="254" bIns="254" rtlCol="0" anchor="ctr">
+          <a:bodyPr wrap="square" lIns="36576" tIns="36576" rIns="36576" bIns="36576" rtlCol="0" anchor="ctr">
             <a:normAutofit/>
           </a:bodyPr>
           <a:lstStyle/>
           <a:p>
-            <a:pPr marL="0" indent="0" algn="ctr">
-              <a:buNone/>
-            </a:pPr>
-            <a:r>
-              <a:rPr sz="900">
-                <a:solidFill>
-                  <a:srgbClr val="1E293B"/>
-                </a:solidFill>
+            <a:pPr algn="l"/>
+            <a:r>
+              <a:rPr sz="900" b="0">
+                <a:solidFill>
+                  <a:srgbClr val="0F172A"/>
+                </a:solidFill>
+                <a:latin typeface="Aptos"/>
               </a:rPr>
               <a:t>Cirrascale Qualcomm Cloud AI (/apis/v2), DeepSeek-R1-Distill-70B &amp; Llama-3.1-8B, zero-hallucination prompt contract</a:t>
             </a:r>
-            <a:endParaRPr lang="en-US" sz="1150" dirty="0"/>
           </a:p>
         </p:txBody>
       </p:sp>
@@ -5212,23 +5129,21 @@
           <a:ln/>
         </p:spPr>
         <p:txBody>
-          <a:bodyPr wrap="square" lIns="254" tIns="254" rIns="254" bIns="254" rtlCol="0" anchor="ctr">
+          <a:bodyPr wrap="square" lIns="36576" tIns="36576" rIns="36576" bIns="36576" rtlCol="0" anchor="ctr">
             <a:normAutofit/>
           </a:bodyPr>
           <a:lstStyle/>
           <a:p>
-            <a:pPr marL="0" indent="0" algn="ctr">
-              <a:buNone/>
-            </a:pPr>
-            <a:r>
-              <a:rPr sz="900">
-                <a:solidFill>
-                  <a:srgbClr val="1E293B"/>
-                </a:solidFill>
+            <a:pPr algn="l"/>
+            <a:r>
+              <a:rPr sz="900" b="0">
+                <a:solidFill>
+                  <a:srgbClr val="0F172A"/>
+                </a:solidFill>
+                <a:latin typeface="Aptos"/>
               </a:rPr>
               <a:t>Interactive Action Table, Jira/Asana-ready CSV export, schema-validated JSON, and Clarification Alerts</a:t>
             </a:r>
-            <a:endParaRPr lang="en-US" sz="1150" dirty="0"/>
           </a:p>
         </p:txBody>
       </p:sp>
@@ -5339,23 +5254,21 @@
           <a:ln/>
         </p:spPr>
         <p:txBody>
-          <a:bodyPr wrap="square" lIns="254" tIns="254" rIns="254" bIns="254" rtlCol="0" anchor="ctr">
+          <a:bodyPr wrap="square" lIns="36576" tIns="36576" rIns="36576" bIns="36576" rtlCol="0" anchor="ctr">
             <a:normAutofit/>
           </a:bodyPr>
           <a:lstStyle/>
           <a:p>
-            <a:pPr marL="0" indent="0">
-              <a:buNone/>
-            </a:pPr>
-            <a:r>
-              <a:rPr sz="900">
-                <a:solidFill>
-                  <a:srgbClr val="1E293B"/>
-                </a:solidFill>
+            <a:pPr algn="l"/>
+            <a:r>
+              <a:rPr sz="900" b="0">
+                <a:solidFill>
+                  <a:srgbClr val="0F172A"/>
+                </a:solidFill>
+                <a:latin typeface="Aptos"/>
               </a:rPr>
               <a:t>Python 3.12, Streamlit 1.42+, Pydantic v2, Requests, Pandas, Pytest, Cirrascale Qualcomm Cloud AI (OpenAI REST protocol)</a:t>
             </a:r>
-            <a:endParaRPr lang="en-US" sz="1200" dirty="0"/>
           </a:p>
         </p:txBody>
       </p:sp>
@@ -5466,32 +5379,33 @@
           <a:ln/>
         </p:spPr>
         <p:txBody>
-          <a:bodyPr wrap="square" lIns="254" tIns="254" rIns="254" bIns="254" rtlCol="0" anchor="ctr">
+          <a:bodyPr wrap="square" lIns="36576" tIns="36576" rIns="36576" bIns="36576" rtlCol="0" anchor="ctr">
             <a:normAutofit/>
           </a:bodyPr>
           <a:lstStyle/>
           <a:p>
-            <a:pPr marL="0" indent="0">
-              <a:buNone/>
-            </a:pPr>
-            <a:r>
-              <a:rPr sz="850">
-                <a:solidFill>
-                  <a:srgbClr val="1E293B"/>
-                </a:solidFill>
+            <a:pPr algn="l"/>
+            <a:r>
+              <a:rPr sz="850" b="0">
+                <a:solidFill>
+                  <a:srgbClr val="0F172A"/>
+                </a:solidFill>
+                <a:latin typeface="Aptos"/>
               </a:rPr>
               <a:t>• Single-Request Invariant: Guarantees staying within $3 budget (~3,820 runs).</a:t>
             </a:r>
-            <a:br/>
-            <a:r>
-              <a:rPr sz="850">
-                <a:solidFill>
-                  <a:srgbClr val="1E293B"/>
-                </a:solidFill>
+          </a:p>
+          <a:p>
+            <a:pPr algn="l"/>
+            <a:r>
+              <a:rPr sz="850" b="0">
+                <a:solidFill>
+                  <a:srgbClr val="0F172A"/>
+                </a:solidFill>
+                <a:latin typeface="Aptos"/>
               </a:rPr>
               <a:t>• Separation of Concerns: LLM handles semantics; deterministic code audits business integrity.</a:t>
             </a:r>
-            <a:endParaRPr lang="en-US" sz="1200" dirty="0"/>
           </a:p>
         </p:txBody>
       </p:sp>
@@ -5602,32 +5516,33 @@
           <a:ln/>
         </p:spPr>
         <p:txBody>
-          <a:bodyPr wrap="square" lIns="254" tIns="254" rIns="254" bIns="254" rtlCol="0" anchor="ctr">
+          <a:bodyPr wrap="square" lIns="36576" tIns="36576" rIns="36576" bIns="36576" rtlCol="0" anchor="ctr">
             <a:normAutofit/>
           </a:bodyPr>
           <a:lstStyle/>
           <a:p>
-            <a:pPr marL="0" indent="0">
-              <a:buNone/>
-            </a:pPr>
-            <a:r>
-              <a:rPr sz="850">
-                <a:solidFill>
-                  <a:srgbClr val="16A34A"/>
-                </a:solidFill>
+            <a:pPr algn="l"/>
+            <a:r>
+              <a:rPr sz="850" b="0">
+                <a:solidFill>
+                  <a:srgbClr val="0F172A"/>
+                </a:solidFill>
+                <a:latin typeface="Aptos"/>
               </a:rPr>
               <a:t>• 30 Automated Pytest Tests (100% Pass Rate) covering schemas, heuristics, and network drops (401, 429, timeout).</a:t>
             </a:r>
-            <a:br/>
-            <a:r>
-              <a:rPr sz="850">
-                <a:solidFill>
-                  <a:srgbClr val="16A34A"/>
-                </a:solidFill>
+          </a:p>
+          <a:p>
+            <a:pPr algn="l"/>
+            <a:r>
+              <a:rPr sz="850" b="0">
+                <a:solidFill>
+                  <a:srgbClr val="0F172A"/>
+                </a:solidFill>
+                <a:latin typeface="Aptos"/>
               </a:rPr>
               <a:t>• Fail-safe zero-credit benchmark mode.</a:t>
             </a:r>
-            <a:endParaRPr lang="en-US" sz="1200" dirty="0"/>
           </a:p>
         </p:txBody>
       </p:sp>
@@ -6229,32 +6144,33 @@
           <a:ln/>
         </p:spPr>
         <p:txBody>
-          <a:bodyPr wrap="square" lIns="254" tIns="254" rIns="254" bIns="254" rtlCol="0" anchor="ctr">
+          <a:bodyPr wrap="square" lIns="36576" tIns="36576" rIns="36576" bIns="36576" rtlCol="0" anchor="ctr">
             <a:normAutofit fontScale="62500" lnSpcReduction="20000"/>
           </a:bodyPr>
           <a:lstStyle/>
           <a:p>
-            <a:pPr marL="0" indent="0">
-              <a:buNone/>
-            </a:pPr>
-            <a:r>
-              <a:rPr sz="1000">
-                <a:solidFill>
-                  <a:srgbClr val="1E293B"/>
-                </a:solidFill>
+            <a:pPr algn="l"/>
+            <a:r>
+              <a:rPr sz="1000" b="0">
+                <a:solidFill>
+                  <a:srgbClr val="0F172A"/>
+                </a:solidFill>
+                <a:latin typeface="Aptos"/>
               </a:rPr>
               <a:t>Hardware-accelerated LLM on Qualcomm Cloud AI (Cirrascale Inference Suite)</a:t>
             </a:r>
-            <a:br/>
-            <a:r>
-              <a:rPr sz="1000">
-                <a:solidFill>
-                  <a:srgbClr val="1E293B"/>
-                </a:solidFill>
+          </a:p>
+          <a:p>
+            <a:pPr algn="l"/>
+            <a:r>
+              <a:rPr sz="1000" b="0">
+                <a:solidFill>
+                  <a:srgbClr val="0F172A"/>
+                </a:solidFill>
+                <a:latin typeface="Aptos"/>
               </a:rPr>
               <a:t>• Models: DeepSeek-R1-Distill-Llama-70B &amp; Llama-3.1-8B</a:t>
             </a:r>
-            <a:endParaRPr lang="en-US" sz="1900" dirty="0"/>
           </a:p>
         </p:txBody>
       </p:sp>
@@ -6365,23 +6281,21 @@
           <a:ln/>
         </p:spPr>
         <p:txBody>
-          <a:bodyPr wrap="square" lIns="254" tIns="254" rIns="254" bIns="254" rtlCol="0" anchor="ctr">
+          <a:bodyPr wrap="square" lIns="36576" tIns="36576" rIns="36576" bIns="36576" rtlCol="0" anchor="ctr">
             <a:normAutofit/>
           </a:bodyPr>
           <a:lstStyle/>
           <a:p>
-            <a:pPr marL="0" indent="0">
-              <a:buNone/>
-            </a:pPr>
-            <a:r>
-              <a:rPr sz="950">
-                <a:solidFill>
-                  <a:srgbClr val="1E293B"/>
-                </a:solidFill>
+            <a:pPr algn="l"/>
+            <a:r>
+              <a:rPr sz="950" b="0">
+                <a:solidFill>
+                  <a:srgbClr val="0F172A"/>
+                </a:solidFill>
+                <a:latin typeface="Aptos"/>
               </a:rPr>
               <a:t>Dual-Layer Hybrid Intelligence: Generative extraction paired with deterministic symbolic auditing. Proactively generates clarification questions instead of guessing.</a:t>
             </a:r>
-            <a:endParaRPr lang="en-US" sz="1200" dirty="0"/>
           </a:p>
         </p:txBody>
       </p:sp>
@@ -6491,23 +6405,21 @@
           <a:ln/>
         </p:spPr>
         <p:txBody>
-          <a:bodyPr wrap="square" lIns="254" tIns="254" rIns="254" bIns="254" rtlCol="0" anchor="ctr">
+          <a:bodyPr wrap="square" lIns="36576" tIns="36576" rIns="36576" bIns="36576" rtlCol="0" anchor="ctr">
             <a:normAutofit/>
           </a:bodyPr>
           <a:lstStyle/>
           <a:p>
-            <a:pPr marL="0" indent="0">
-              <a:buNone/>
-            </a:pPr>
-            <a:r>
-              <a:rPr sz="900">
-                <a:solidFill>
-                  <a:srgbClr val="1E293B"/>
-                </a:solidFill>
+            <a:pPr algn="l"/>
+            <a:r>
+              <a:rPr sz="900" b="0">
+                <a:solidFill>
+                  <a:srgbClr val="0F172A"/>
+                </a:solidFill>
+                <a:latin typeface="Aptos"/>
               </a:rPr>
               <a:t>Semantic extraction of actionable tasks, isolation of confirmed decisions vs tentative proposals, and verbatim citation grounding.</a:t>
             </a:r>
-            <a:endParaRPr lang="en-US" sz="1150" dirty="0"/>
           </a:p>
         </p:txBody>
       </p:sp>
@@ -6617,23 +6529,21 @@
           <a:ln/>
         </p:spPr>
         <p:txBody>
-          <a:bodyPr wrap="square" lIns="254" tIns="254" rIns="254" bIns="254" rtlCol="0" anchor="ctr">
+          <a:bodyPr wrap="square" lIns="36576" tIns="36576" rIns="36576" bIns="36576" rtlCol="0" anchor="ctr">
             <a:normAutofit/>
           </a:bodyPr>
           <a:lstStyle/>
           <a:p>
-            <a:pPr marL="0" indent="0">
-              <a:buNone/>
-            </a:pPr>
-            <a:r>
-              <a:rPr sz="900">
-                <a:solidFill>
-                  <a:srgbClr val="1E293B"/>
-                </a:solidFill>
+            <a:pPr algn="l"/>
+            <a:r>
+              <a:rPr sz="900" b="0">
+                <a:solidFill>
+                  <a:srgbClr val="0F172A"/>
+                </a:solidFill>
+                <a:latin typeface="Aptos"/>
               </a:rPr>
               <a:t>Cirrascale Qualcomm Cloud AI running DeepSeek-R1 (for reasoning traces) and Llama-3.1 (for fast edge inference).</a:t>
             </a:r>
-            <a:endParaRPr lang="en-US" sz="1150" dirty="0"/>
           </a:p>
         </p:txBody>
       </p:sp>
@@ -6743,23 +6653,21 @@
           <a:ln/>
         </p:spPr>
         <p:txBody>
-          <a:bodyPr wrap="square" lIns="254" tIns="254" rIns="254" bIns="254" rtlCol="0" anchor="ctr">
+          <a:bodyPr wrap="square" lIns="36576" tIns="36576" rIns="36576" bIns="36576" rtlCol="0" anchor="ctr">
             <a:normAutofit/>
           </a:bodyPr>
           <a:lstStyle/>
           <a:p>
-            <a:pPr marL="0" indent="0">
-              <a:buNone/>
-            </a:pPr>
-            <a:r>
-              <a:rPr sz="850">
-                <a:solidFill>
-                  <a:srgbClr val="1E293B"/>
-                </a:solidFill>
+            <a:pPr algn="l"/>
+            <a:r>
+              <a:rPr sz="850" b="0">
+                <a:solidFill>
+                  <a:srgbClr val="0F172A"/>
+                </a:solidFill>
+                <a:latin typeface="Aptos"/>
               </a:rPr>
               <a:t>Verbatim citations enforced for all tasks/decisions; reasoning constrained to &lt;50 words (slashing latency to 25s); Pydantic type validation; 30 unit tests.</a:t>
             </a:r>
-            <a:endParaRPr lang="en-US" sz="1150" dirty="0"/>
           </a:p>
         </p:txBody>
       </p:sp>
@@ -6869,23 +6777,21 @@
           <a:ln/>
         </p:spPr>
         <p:txBody>
-          <a:bodyPr wrap="square" lIns="254" tIns="254" rIns="254" bIns="254" rtlCol="0" anchor="ctr">
+          <a:bodyPr wrap="square" lIns="36576" tIns="36576" rIns="36576" bIns="36576" rtlCol="0" anchor="ctr">
             <a:normAutofit/>
           </a:bodyPr>
           <a:lstStyle/>
           <a:p>
-            <a:pPr marL="0" indent="0">
-              <a:buNone/>
-            </a:pPr>
-            <a:r>
-              <a:rPr sz="850">
-                <a:solidFill>
-                  <a:srgbClr val="16A34A"/>
-                </a:solidFill>
+            <a:pPr algn="l"/>
+            <a:r>
+              <a:rPr sz="850" b="0">
+                <a:solidFill>
+                  <a:srgbClr val="0F172A"/>
+                </a:solidFill>
+                <a:latin typeface="Aptos"/>
               </a:rPr>
               <a:t>90% reduction in post-meeting triage time. Official Cirrascale unit economics: $0.00078 per meeting on 70B (&lt; 1/10th of a cent), costing &lt; $1.00/month for 1,000 enterprise meetings.</a:t>
             </a:r>
-            <a:endParaRPr lang="en-US" sz="1150" dirty="0"/>
           </a:p>
         </p:txBody>
       </p:sp>
@@ -7567,23 +7473,21 @@
           <a:ln/>
         </p:spPr>
         <p:txBody>
-          <a:bodyPr wrap="square" lIns="254" tIns="254" rIns="254" bIns="254" rtlCol="0" anchor="ctr">
+          <a:bodyPr wrap="square" lIns="36576" tIns="36576" rIns="36576" bIns="36576" rtlCol="0" anchor="ctr">
             <a:normAutofit/>
           </a:bodyPr>
           <a:lstStyle/>
           <a:p>
-            <a:pPr marL="0" indent="0">
-              <a:buNone/>
-            </a:pPr>
-            <a:r>
-              <a:rPr sz="900">
-                <a:solidFill>
-                  <a:srgbClr val="1E293B"/>
-                </a:solidFill>
+            <a:pPr algn="l"/>
+            <a:r>
+              <a:rPr sz="850" b="0">
+                <a:solidFill>
+                  <a:srgbClr val="0F172A"/>
+                </a:solidFill>
+                <a:latin typeface="Aptos"/>
               </a:rPr>
               <a:t>Live Audio &amp; On-Device NPU Transcription: Whisper model integration running locally on Snapdragon X Elite NPU hardware.</a:t>
             </a:r>
-            <a:endParaRPr lang="en-US" sz="1150" dirty="0"/>
           </a:p>
         </p:txBody>
       </p:sp>
@@ -7691,23 +7595,21 @@
           <a:ln/>
         </p:spPr>
         <p:txBody>
-          <a:bodyPr wrap="square" lIns="254" tIns="254" rIns="254" bIns="254" rtlCol="0" anchor="ctr">
+          <a:bodyPr wrap="square" lIns="36576" tIns="36576" rIns="36576" bIns="36576" rtlCol="0" anchor="ctr">
             <a:normAutofit/>
           </a:bodyPr>
           <a:lstStyle/>
           <a:p>
-            <a:pPr marL="0" indent="0">
-              <a:buNone/>
-            </a:pPr>
-            <a:r>
-              <a:rPr sz="900">
-                <a:solidFill>
-                  <a:srgbClr val="1E293B"/>
-                </a:solidFill>
+            <a:pPr algn="l"/>
+            <a:r>
+              <a:rPr sz="850" b="0">
+                <a:solidFill>
+                  <a:srgbClr val="0F172A"/>
+                </a:solidFill>
+                <a:latin typeface="Aptos"/>
               </a:rPr>
               <a:t>Two-Way Enterprise Ticketing: Direct REST API connectors for Jira, Linear, Asana, and GitHub Issues.</a:t>
             </a:r>
-            <a:endParaRPr lang="en-US" sz="1150" dirty="0"/>
           </a:p>
         </p:txBody>
       </p:sp>
@@ -7815,23 +7717,21 @@
           <a:ln/>
         </p:spPr>
         <p:txBody>
-          <a:bodyPr wrap="square" lIns="254" tIns="254" rIns="254" bIns="254" rtlCol="0" anchor="ctr">
+          <a:bodyPr wrap="square" lIns="36576" tIns="36576" rIns="36576" bIns="36576" rtlCol="0" anchor="ctr">
             <a:normAutofit/>
           </a:bodyPr>
           <a:lstStyle/>
           <a:p>
-            <a:pPr marL="0" indent="0">
-              <a:buNone/>
-            </a:pPr>
-            <a:r>
-              <a:rPr sz="900">
-                <a:solidFill>
-                  <a:srgbClr val="1E293B"/>
-                </a:solidFill>
+            <a:pPr algn="l"/>
+            <a:r>
+              <a:rPr sz="850" b="0">
+                <a:solidFill>
+                  <a:srgbClr val="0F172A"/>
+                </a:solidFill>
+                <a:latin typeface="Aptos"/>
               </a:rPr>
               <a:t>Automated Slack / Microsoft Teams Bot: Proactively pings owners on Slack to confirm tentative assignments or clarify vague deadlines.</a:t>
             </a:r>
-            <a:endParaRPr lang="en-US" sz="1150" dirty="0"/>
           </a:p>
         </p:txBody>
       </p:sp>
@@ -8022,23 +7922,21 @@
           <a:ln/>
         </p:spPr>
         <p:txBody>
-          <a:bodyPr wrap="square" lIns="254" tIns="254" rIns="254" bIns="254" rtlCol="0" anchor="ctr">
+          <a:bodyPr wrap="square" lIns="36576" tIns="36576" rIns="36576" bIns="36576" rtlCol="0" anchor="ctr">
             <a:normAutofit/>
           </a:bodyPr>
           <a:lstStyle/>
           <a:p>
-            <a:pPr marL="0" indent="0">
-              <a:buNone/>
-            </a:pPr>
-            <a:r>
-              <a:rPr sz="900">
-                <a:solidFill>
-                  <a:srgbClr val="1E293B"/>
-                </a:solidFill>
+            <a:pPr algn="l"/>
+            <a:r>
+              <a:rPr sz="850" b="0">
+                <a:solidFill>
+                  <a:srgbClr val="0F172A"/>
+                </a:solidFill>
+                <a:latin typeface="Aptos"/>
               </a:rPr>
               <a:t>Stateless microservice containerization deployable on Kubernetes across multi-tenant enterprise clusters.</a:t>
             </a:r>
-            <a:endParaRPr lang="en-US" sz="1150" dirty="0"/>
           </a:p>
         </p:txBody>
       </p:sp>
@@ -8146,23 +8044,21 @@
           <a:ln/>
         </p:spPr>
         <p:txBody>
-          <a:bodyPr wrap="square" lIns="254" tIns="254" rIns="254" bIns="254" rtlCol="0" anchor="ctr">
+          <a:bodyPr wrap="square" lIns="36576" tIns="36576" rIns="36576" bIns="36576" rtlCol="0" anchor="ctr">
             <a:normAutofit/>
           </a:bodyPr>
           <a:lstStyle/>
           <a:p>
-            <a:pPr marL="0" indent="0">
-              <a:buNone/>
-            </a:pPr>
-            <a:r>
-              <a:rPr sz="900">
-                <a:solidFill>
-                  <a:srgbClr val="1E293B"/>
-                </a:solidFill>
+            <a:pPr algn="l"/>
+            <a:r>
+              <a:rPr sz="850" b="0">
+                <a:solidFill>
+                  <a:srgbClr val="0F172A"/>
+                </a:solidFill>
+                <a:latin typeface="Aptos"/>
               </a:rPr>
               <a:t>100% on-device NPU processing on Snapdragon laptops via Qualcomm AI Hub with zero cloud cost.</a:t>
             </a:r>
-            <a:endParaRPr lang="en-US" sz="1150" dirty="0"/>
           </a:p>
         </p:txBody>
       </p:sp>
@@ -8270,23 +8166,21 @@
           <a:ln/>
         </p:spPr>
         <p:txBody>
-          <a:bodyPr wrap="square" lIns="254" tIns="254" rIns="254" bIns="254" rtlCol="0" anchor="ctr">
+          <a:bodyPr wrap="square" lIns="36576" tIns="36576" rIns="36576" bIns="36576" rtlCol="0" anchor="ctr">
             <a:normAutofit/>
           </a:bodyPr>
           <a:lstStyle/>
           <a:p>
-            <a:pPr marL="0" indent="0">
-              <a:buNone/>
-            </a:pPr>
-            <a:r>
-              <a:rPr sz="900">
-                <a:solidFill>
-                  <a:srgbClr val="1E293B"/>
-                </a:solidFill>
+            <a:pPr algn="l"/>
+            <a:r>
+              <a:rPr sz="850" b="0">
+                <a:solidFill>
+                  <a:srgbClr val="0F172A"/>
+                </a:solidFill>
+                <a:latin typeface="Aptos"/>
               </a:rPr>
               <a:t>Token bucket rate-limiting with exponential backoff handling 10,000+ concurrent summaries.</a:t>
             </a:r>
-            <a:endParaRPr lang="en-US" sz="1150" dirty="0"/>
           </a:p>
         </p:txBody>
       </p:sp>
@@ -8477,23 +8371,21 @@
           <a:ln/>
         </p:spPr>
         <p:txBody>
-          <a:bodyPr wrap="square" lIns="254" tIns="254" rIns="254" bIns="254" rtlCol="0" anchor="ctr">
+          <a:bodyPr wrap="square" lIns="36576" tIns="36576" rIns="36576" bIns="36576" rtlCol="0" anchor="ctr">
             <a:normAutofit/>
           </a:bodyPr>
           <a:lstStyle/>
           <a:p>
-            <a:pPr marL="0" indent="0">
-              <a:buNone/>
-            </a:pPr>
-            <a:r>
-              <a:rPr sz="900">
-                <a:solidFill>
-                  <a:srgbClr val="1E293B"/>
-                </a:solidFill>
+            <a:pPr algn="l"/>
+            <a:r>
+              <a:rPr sz="850" b="0">
+                <a:solidFill>
+                  <a:srgbClr val="0F172A"/>
+                </a:solidFill>
+                <a:latin typeface="Aptos"/>
               </a:rPr>
               <a:t>Role-based enterprise access control (RBAC) and encrypted credential management (.env isolation).</a:t>
             </a:r>
-            <a:endParaRPr lang="en-US" sz="1150" dirty="0"/>
           </a:p>
         </p:txBody>
       </p:sp>
@@ -8601,23 +8493,21 @@
           <a:ln/>
         </p:spPr>
         <p:txBody>
-          <a:bodyPr wrap="square" lIns="254" tIns="254" rIns="254" bIns="254" rtlCol="0" anchor="ctr">
+          <a:bodyPr wrap="square" lIns="36576" tIns="36576" rIns="36576" bIns="36576" rtlCol="0" anchor="ctr">
             <a:normAutofit/>
           </a:bodyPr>
           <a:lstStyle/>
           <a:p>
-            <a:pPr marL="0" indent="0">
-              <a:buNone/>
-            </a:pPr>
-            <a:r>
-              <a:rPr sz="900">
-                <a:solidFill>
-                  <a:srgbClr val="1E293B"/>
-                </a:solidFill>
+            <a:pPr algn="l"/>
+            <a:r>
+              <a:rPr sz="850" b="0">
+                <a:solidFill>
+                  <a:srgbClr val="0F172A"/>
+                </a:solidFill>
+                <a:latin typeface="Aptos"/>
               </a:rPr>
               <a:t>Zero persistent transcript retention — raw text is parsed in-memory and immediately purged (GDPR/HIPAA compliant).</a:t>
             </a:r>
-            <a:endParaRPr lang="en-US" sz="1150" dirty="0"/>
           </a:p>
         </p:txBody>
       </p:sp>
@@ -8725,23 +8615,21 @@
           <a:ln/>
         </p:spPr>
         <p:txBody>
-          <a:bodyPr wrap="square" lIns="254" tIns="254" rIns="254" bIns="254" rtlCol="0" anchor="ctr">
+          <a:bodyPr wrap="square" lIns="36576" tIns="36576" rIns="36576" bIns="36576" rtlCol="0" anchor="ctr">
             <a:normAutofit/>
           </a:bodyPr>
           <a:lstStyle/>
           <a:p>
-            <a:pPr marL="0" indent="0">
-              <a:buNone/>
-            </a:pPr>
-            <a:r>
-              <a:rPr sz="900">
-                <a:solidFill>
-                  <a:srgbClr val="1E293B"/>
-                </a:solidFill>
+            <a:pPr algn="l"/>
+            <a:r>
+              <a:rPr sz="850" b="0">
+                <a:solidFill>
+                  <a:srgbClr val="0F172A"/>
+                </a:solidFill>
+                <a:latin typeface="Aptos"/>
               </a:rPr>
               <a:t>Human-in-the-loop triage: AI confidence signals with mandatory human sign-off before downstream ticketing export.</a:t>
             </a:r>
-            <a:endParaRPr lang="en-US" sz="1150" dirty="0"/>
           </a:p>
         </p:txBody>
       </p:sp>
@@ -9121,304 +9009,106 @@
         </p:nvSpPr>
         <p:spPr>
           <a:xfrm>
-            <a:off x="3297836" y="2173574"/>
-            <a:ext cx="5801194" cy="1015663"/>
-          </a:xfrm>
-          <a:prstGeom prst="rect">
-            <a:avLst/>
-          </a:prstGeom>
-          <a:noFill/>
-        </p:spPr>
-        <p:txBody>
-          <a:bodyPr wrap="square" rtlCol="0">
+            <a:off x="1097280" y="1371600"/>
+            <a:ext cx="9966960" cy="4389120"/>
+          </a:xfrm>
+          <a:prstGeom prst="rect">
+            <a:avLst/>
+          </a:prstGeom>
+          <a:noFill/>
+        </p:spPr>
+        <p:txBody>
+          <a:bodyPr wrap="square" rtlCol="0" tIns="91440" bIns="91440">
             <a:spAutoFit/>
           </a:bodyPr>
           <a:lstStyle/>
           <a:p>
-            <a:pPr algn="ctr">
-              <a:defRPr sz="2800" b="1">
-                <a:solidFill>
-                  <a:srgbClr val="4F46E5"/>
-                </a:solidFill>
-              </a:defRPr>
-            </a:pPr>
-            <a:r>
-              <a:t>LIVE DEMONSTRATION</a:t>
-            </a:r>
-          </a:p>
-        </p:txBody>
-      </p:sp>
-      <p:sp>
-        <p:nvSpPr>
-          <p:cNvPr id="3" name="TextBox 2"/>
-          <p:cNvSpPr txBox="1"/>
-          <p:nvPr/>
-        </p:nvSpPr>
-        <p:spPr>
-          <a:xfrm>
-            <a:off x="2743200" y="3108960"/>
-            <a:ext cx="6702552" cy="457200"/>
-          </a:xfrm>
-          <a:prstGeom prst="rect">
-            <a:avLst/>
-          </a:prstGeom>
-          <a:noFill/>
-        </p:spPr>
-        <p:txBody>
-          <a:bodyPr wrap="none">
-            <a:spAutoFit/>
-          </a:bodyPr>
-          <a:lstStyle/>
-          <a:p>
-            <a:pPr algn="ctr">
-              <a:defRPr sz="1400" b="1">
+            <a:pPr algn="ctr"/>
+            <a:r>
+              <a:rPr sz="2800" b="1">
+                <a:solidFill>
+                  <a:srgbClr val="003B7A"/>
+                </a:solidFill>
+                <a:latin typeface="Aptos Display"/>
+              </a:rPr>
+              <a:t>LIVE DEMONSTRATION: MEETINGMIND AI</a:t>
+            </a:r>
+          </a:p>
+          <a:p>
+            <a:pPr algn="ctr"/>
+            <a:r>
+              <a:rPr sz="1300" b="1">
+                <a:solidFill>
+                  <a:srgbClr val="475569"/>
+                </a:solidFill>
+                <a:latin typeface="Aptos"/>
+              </a:rPr>
+              <a:t>Problem EP-01: Smart Meeting Action Extractor  •  Qualcomm Cloud AI Track  •  http://localhost:8501</a:t>
+            </a:r>
+          </a:p>
+          <a:p/>
+          <a:p>
+            <a:pPr algn="l"/>
+            <a:r>
+              <a:rPr sz="1100">
                 <a:solidFill>
                   <a:srgbClr val="0F172A"/>
                 </a:solidFill>
-              </a:defRPr>
-            </a:pPr>
-            <a:r>
-              <a:t>MeetingMind AI Running Live on Qualcomm Cloud AI • http://localhost:8501</a:t>
-            </a:r>
-          </a:p>
-        </p:txBody>
-      </p:sp>
-      <p:sp>
-        <p:nvSpPr>
-          <p:cNvPr id="4" name="Rounded Rectangle 3"/>
-          <p:cNvSpPr/>
-          <p:nvPr/>
-        </p:nvSpPr>
-        <p:spPr>
-          <a:xfrm>
-            <a:off x="1371600" y="3840480"/>
-            <a:ext cx="4389120" cy="2377440"/>
-          </a:xfrm>
-          <a:prstGeom prst="roundRect">
-            <a:avLst/>
-          </a:prstGeom>
-          <a:solidFill>
-            <a:srgbClr val="F8FAFC"/>
-          </a:solidFill>
-          <a:ln>
-            <a:solidFill>
-              <a:srgbClr val="CBD5E1"/>
-            </a:solidFill>
-          </a:ln>
-        </p:spPr>
-        <p:style>
-          <a:lnRef idx="1">
-            <a:schemeClr val="accent1"/>
-          </a:lnRef>
-          <a:fillRef idx="3">
-            <a:schemeClr val="accent1"/>
-          </a:fillRef>
-          <a:effectRef idx="2">
-            <a:schemeClr val="accent1"/>
-          </a:effectRef>
-          <a:fontRef idx="minor">
-            <a:schemeClr val="lt1"/>
-          </a:fontRef>
-        </p:style>
-        <p:txBody>
-          <a:bodyPr rtlCol="0" anchor="ctr" wrap="square"/>
-          <a:lstStyle/>
-          <a:p>
-            <a:pPr algn="ctr">
-              <a:defRPr b="1" sz="1100">
-                <a:solidFill>
-                  <a:srgbClr val="4F46E5"/>
-                </a:solidFill>
-              </a:defRPr>
-            </a:pPr>
-            <a:r>
-              <a:t>LIVE DEMO STEPS</a:t>
-            </a:r>
-          </a:p>
-          <a:p>
-            <a:pPr>
-              <a:defRPr sz="950">
-                <a:solidFill>
-                  <a:srgbClr val="1E293B"/>
-                </a:solidFill>
-              </a:defRPr>
-            </a:pPr>
-            <a:r>
-              <a:t>1. Sidebar Health Check: Live AI connected to Cirrascale.</a:t>
-            </a:r>
-          </a:p>
-          <a:p>
-            <a:pPr>
-              <a:defRPr sz="950">
-                <a:solidFill>
-                  <a:srgbClr val="1E293B"/>
-                </a:solidFill>
-              </a:defRPr>
-            </a:pPr>
-            <a:r>
-              <a:t>2. Input Notes: Load benchmark notes with unassigned tasks.</a:t>
-            </a:r>
-          </a:p>
-          <a:p>
-            <a:pPr>
-              <a:defRPr sz="950">
-                <a:solidFill>
-                  <a:srgbClr val="1E293B"/>
-                </a:solidFill>
-              </a:defRPr>
-            </a:pPr>
-            <a:r>
-              <a:t>3. Live Inference: DeepSeek-R1 execution on Qualcomm hardware.</a:t>
-            </a:r>
-          </a:p>
-          <a:p>
-            <a:pPr>
-              <a:defRPr sz="950">
-                <a:solidFill>
-                  <a:srgbClr val="1E293B"/>
-                </a:solidFill>
-              </a:defRPr>
-            </a:pPr>
-            <a:r>
-              <a:t>4. Triage Table: Filter by priority, owner, and status.</a:t>
-            </a:r>
-          </a:p>
-          <a:p>
-            <a:pPr>
-              <a:defRPr sz="950">
-                <a:solidFill>
-                  <a:srgbClr val="1E293B"/>
-                </a:solidFill>
-              </a:defRPr>
-            </a:pPr>
-            <a:r>
-              <a:t>5. Export: Download RFC-compliant Jira/Asana CSV.</a:t>
-            </a:r>
-          </a:p>
-        </p:txBody>
-      </p:sp>
-      <p:sp>
-        <p:nvSpPr>
-          <p:cNvPr id="5" name="Rounded Rectangle 4"/>
-          <p:cNvSpPr/>
-          <p:nvPr/>
-        </p:nvSpPr>
-        <p:spPr>
-          <a:xfrm>
-            <a:off x="6400800" y="3840480"/>
-            <a:ext cx="4389120" cy="2377440"/>
-          </a:xfrm>
-          <a:prstGeom prst="roundRect">
-            <a:avLst/>
-          </a:prstGeom>
-          <a:solidFill>
-            <a:srgbClr val="F8FAFC"/>
-          </a:solidFill>
-          <a:ln>
-            <a:solidFill>
-              <a:srgbClr val="CBD5E1"/>
-            </a:solidFill>
-          </a:ln>
-        </p:spPr>
-        <p:style>
-          <a:lnRef idx="1">
-            <a:schemeClr val="accent1"/>
-          </a:lnRef>
-          <a:fillRef idx="3">
-            <a:schemeClr val="accent1"/>
-          </a:fillRef>
-          <a:effectRef idx="2">
-            <a:schemeClr val="accent1"/>
-          </a:effectRef>
-          <a:fontRef idx="minor">
-            <a:schemeClr val="lt1"/>
-          </a:fontRef>
-        </p:style>
-        <p:txBody>
-          <a:bodyPr rtlCol="0" anchor="ctr" wrap="square"/>
-          <a:lstStyle/>
-          <a:p>
-            <a:pPr algn="ctr">
-              <a:defRPr b="1" sz="1100">
-                <a:solidFill>
-                  <a:srgbClr val="4F46E5"/>
-                </a:solidFill>
-              </a:defRPr>
-            </a:pPr>
-            <a:r>
-              <a:t>WHAT THE JUDGES WILL SEE</a:t>
-            </a:r>
-          </a:p>
-          <a:p>
-            <a:pPr>
-              <a:defRPr sz="950">
-                <a:solidFill>
-                  <a:srgbClr val="1E293B"/>
-                </a:solidFill>
-              </a:defRPr>
-            </a:pPr>
-            <a:r>
-              <a:t>• Rahul (API Integration): Confirmed (Due: Friday)</a:t>
-            </a:r>
-          </a:p>
-          <a:p>
-            <a:pPr>
-              <a:defRPr sz="950">
-                <a:solidFill>
-                  <a:srgbClr val="1E293B"/>
-                </a:solidFill>
-              </a:defRPr>
-            </a:pPr>
-            <a:r>
-              <a:t>• Priya (Testing): Tentative Flag ('Not confirmed')</a:t>
-            </a:r>
-          </a:p>
-          <a:p>
-            <a:pPr>
-              <a:defRPr sz="950">
-                <a:solidFill>
-                  <a:srgbClr val="1E293B"/>
-                </a:solidFill>
-              </a:defRPr>
-            </a:pPr>
-            <a:r>
-              <a:t>• Deployment Plan: Missing Owner + Vague Date ('soon')</a:t>
-            </a:r>
-          </a:p>
-          <a:p>
-            <a:pPr>
-              <a:defRPr sz="950">
-                <a:solidFill>
-                  <a:srgbClr val="1E293B"/>
-                </a:solidFill>
-              </a:defRPr>
-            </a:pPr>
-            <a:r>
-              <a:t>• Database Tech: Undecided Technical Decision</a:t>
-            </a:r>
-          </a:p>
-          <a:p>
-            <a:pPr>
-              <a:defRPr sz="950">
-                <a:solidFill>
-                  <a:srgbClr val="1E293B"/>
-                </a:solidFill>
-              </a:defRPr>
-            </a:pPr>
-            <a:r>
-              <a:t>• Interface Review: Confirmed Decision ('tomorrow')</a:t>
-            </a:r>
-          </a:p>
-          <a:p>
-            <a:pPr>
-              <a:defRPr sz="950">
-                <a:solidFill>
-                  <a:srgbClr val="1E293B"/>
-                </a:solidFill>
-              </a:defRPr>
-            </a:pPr>
-            <a:r>
-              <a:t>• Test Suite: 30 Pytest Tests Passing (100%)</a:t>
+                <a:latin typeface="Aptos"/>
+              </a:rPr>
+              <a:t>1. Sidebar Health Check: Live status indicator verifying active handshake with Cirrascale Qualcomm Cloud AI API.</a:t>
+            </a:r>
+          </a:p>
+          <a:p/>
+          <a:p>
+            <a:pPr algn="l"/>
+            <a:r>
+              <a:rPr sz="1100">
+                <a:solidFill>
+                  <a:srgbClr val="0F172A"/>
+                </a:solidFill>
+                <a:latin typeface="Aptos"/>
+              </a:rPr>
+              <a:t>2. Messy Benchmark Transcript: 1-Click loading of real-world notes containing implicit commitments, tentative offers &amp; unassigned work.</a:t>
+            </a:r>
+          </a:p>
+          <a:p/>
+          <a:p>
+            <a:pPr algn="l"/>
+            <a:r>
+              <a:rPr sz="1100">
+                <a:solidFill>
+                  <a:srgbClr val="0F172A"/>
+                </a:solidFill>
+                <a:latin typeface="Aptos"/>
+              </a:rPr>
+              <a:t>3. Live Hardware Execution: Real-time inference using DeepSeek-R1-Distill-70B on Qualcomm Cloud AI with verbatim quote grounding.</a:t>
+            </a:r>
+          </a:p>
+          <a:p/>
+          <a:p>
+            <a:pPr algn="l"/>
+            <a:r>
+              <a:rPr sz="1100">
+                <a:solidFill>
+                  <a:srgbClr val="0F172A"/>
+                </a:solidFill>
+                <a:latin typeface="Aptos"/>
+              </a:rPr>
+              <a:t>4. Anti-Hallucination Triage: Interactive table isolating missing owners &amp; vague dates, surfacing proactive Clarification Questions.</a:t>
+            </a:r>
+          </a:p>
+          <a:p/>
+          <a:p>
+            <a:pPr algn="l"/>
+            <a:r>
+              <a:rPr sz="1100">
+                <a:solidFill>
+                  <a:srgbClr val="0F172A"/>
+                </a:solidFill>
+                <a:latin typeface="Aptos"/>
+              </a:rPr>
+              <a:t>5. Enterprise Deliverables Export: 1-Click download of RFC-compliant Jira/Asana CSV and schema-validated JSON deliverables.</a:t>
             </a:r>
           </a:p>
         </p:txBody>
